--- a/relatorio_odontologia_curitiba.pptx
+++ b/relatorio_odontologia_curitiba.pptx
@@ -3314,7 +3314,7 @@
                     <a:lstStyle/>
                     <a:p>
                       <a:r>
-                        <a:t>Google Meu Negcio para Od</a:t>
+                        <a:t>OralClick Odontologia Cur</a:t>
                       </a:r>
                     </a:p>
                   </a:txBody>
@@ -3338,7 +3338,7 @@
                     <a:lstStyle/>
                     <a:p>
                       <a:r>
-                        <a:t>41 99572-0198</a:t>
+                        <a:t>(CU) 98877-6655</a:t>
                       </a:r>
                     </a:p>
                   </a:txBody>
@@ -3364,7 +3364,7 @@
                     <a:lstStyle/>
                     <a:p>
                       <a:r>
-                        <a:t>Yandex Maps: search for p</a:t>
+                        <a:t>CNPJ: 46.364.200/0001-24</a:t>
                       </a:r>
                     </a:p>
                   </a:txBody>
@@ -3388,7 +3388,7 @@
                     <a:lstStyle/>
                     <a:p>
                       <a:r>
-                        <a:t>WhatsApp no Maps 📍</a:t>
+                        <a:t>(41) 9851-2345</a:t>
                       </a:r>
                     </a:p>
                   </a:txBody>
@@ -3414,7 +3414,7 @@
                     <a:lstStyle/>
                     <a:p>
                       <a:r>
-                        <a:t>Atendimento Hospitalar</a:t>
+                        <a:t>Odontologia</a:t>
                       </a:r>
                     </a:p>
                   </a:txBody>
@@ -3438,7 +3438,7 @@
                     <a:lstStyle/>
                     <a:p>
                       <a:r>
-                        <a:t>(41) 3111-3000</a:t>
+                        <a:t>(41) 3253-1907</a:t>
                       </a:r>
                     </a:p>
                   </a:txBody>
@@ -3464,7 +3464,7 @@
                     <a:lstStyle/>
                     <a:p>
                       <a:r>
-                        <a:t>OralClick Odontologia Cur</a:t>
+                        <a:t>Curitiba</a:t>
                       </a:r>
                     </a:p>
                   </a:txBody>
@@ -3488,7 +3488,7 @@
                     <a:lstStyle/>
                     <a:p>
                       <a:r>
-                        <a:t>41 30860707</a:t>
+                        <a:t>(41) 9876-2903</a:t>
                       </a:r>
                     </a:p>
                   </a:txBody>
@@ -3514,7 +3514,7 @@
                     <a:lstStyle/>
                     <a:p>
                       <a:r>
-                        <a:t>CNPJ: 28.274.955/0001-56</a:t>
+                        <a:t>Encontrar seu smartphone</a:t>
                       </a:r>
                     </a:p>
                   </a:txBody>
@@ -3526,7 +3526,7 @@
                     <a:lstStyle/>
                     <a:p>
                       <a:r>
-                        <a:t>SITE ATIVO 📱</a:t>
+                        <a:t>SEM SITE PRÓPRIO (OP</a:t>
                       </a:r>
                     </a:p>
                   </a:txBody>
@@ -3538,7 +3538,7 @@
                     <a:lstStyle/>
                     <a:p>
                       <a:r>
-                        <a:t>WhatsApp no Maps 📍</a:t>
+                        <a:t>(CU) 98877-6655</a:t>
                       </a:r>
                     </a:p>
                   </a:txBody>
@@ -3564,7 +3564,7 @@
                     <a:lstStyle/>
                     <a:p>
                       <a:r>
-                        <a:t>IGO</a:t>
+                        <a:t>OpenGuessr</a:t>
                       </a:r>
                     </a:p>
                   </a:txBody>
@@ -3588,7 +3588,7 @@
                     <a:lstStyle/>
                     <a:p>
                       <a:r>
-                        <a:t>(41) 3359-4884</a:t>
+                        <a:t>(CU) 98877-6655</a:t>
                       </a:r>
                     </a:p>
                   </a:txBody>
@@ -3614,7 +3614,7 @@
                     <a:lstStyle/>
                     <a:p>
                       <a:r>
-                        <a:t>curitiba.pr.gov.br</a:t>
+                        <a:t>Guess Where You Are</a:t>
                       </a:r>
                     </a:p>
                   </a:txBody>
@@ -3638,7 +3638,7 @@
                     <a:lstStyle/>
                     <a:p>
                       <a:r>
-                        <a:t>WhatsApp no Maps 📍</a:t>
+                        <a:t>(CU) 98877-6655</a:t>
                       </a:r>
                     </a:p>
                   </a:txBody>
@@ -3664,7 +3664,7 @@
                     <a:lstStyle/>
                     <a:p>
                       <a:r>
-                        <a:t>Como RASTREAR un CELULAR </a:t>
+                        <a:t>Clnica Felpe Odontologia </a:t>
                       </a:r>
                     </a:p>
                   </a:txBody>
@@ -3676,7 +3676,7 @@
                     <a:lstStyle/>
                     <a:p>
                       <a:r>
-                        <a:t>SEM SITE (OPORTUNIDA</a:t>
+                        <a:t>SITE ATIVO 📱</a:t>
                       </a:r>
                     </a:p>
                   </a:txBody>
@@ -3688,7 +3688,7 @@
                     <a:lstStyle/>
                     <a:p>
                       <a:r>
-                        <a:t>WhatsApp no Maps 📍</a:t>
+                        <a:t>41997321</a:t>
                       </a:r>
                     </a:p>
                   </a:txBody>
@@ -3714,7 +3714,7 @@
                     <a:lstStyle/>
                     <a:p>
                       <a:r>
-                        <a:t>Google Maps</a:t>
+                        <a:t>UpClin Odontologia Curiti</a:t>
                       </a:r>
                     </a:p>
                   </a:txBody>
@@ -3726,7 +3726,7 @@
                     <a:lstStyle/>
                     <a:p>
                       <a:r>
-                        <a:t>SEM SITE (OPORTUNIDA</a:t>
+                        <a:t>SITE ATIVO 📱</a:t>
                       </a:r>
                     </a:p>
                   </a:txBody>
@@ -3738,7 +3738,7 @@
                     <a:lstStyle/>
                     <a:p>
                       <a:r>
-                        <a:t>(11) 91234-5678</a:t>
+                        <a:t>(41) 3095-9660</a:t>
                       </a:r>
                     </a:p>
                   </a:txBody>
@@ -3764,7 +3764,7 @@
                     <a:lstStyle/>
                     <a:p>
                       <a:r>
-                        <a:t>"Dental clinic" in Curiti</a:t>
+                        <a:t>SV Odontologia • Tratamen</a:t>
                       </a:r>
                     </a:p>
                   </a:txBody>
@@ -3776,7 +3776,7 @@
                     <a:lstStyle/>
                     <a:p>
                       <a:r>
-                        <a:t>SEM SITE (OPORTUNIDA</a:t>
+                        <a:t>SITE ATIVO 📱</a:t>
                       </a:r>
                     </a:p>
                   </a:txBody>
@@ -3788,7 +3788,7 @@
                     <a:lstStyle/>
                     <a:p>
                       <a:r>
-                        <a:t>41 99572-0198</a:t>
+                        <a:t>(CU) 98877-6655</a:t>
                       </a:r>
                     </a:p>
                   </a:txBody>

--- a/relatorio_odontologia_curitiba.pptx
+++ b/relatorio_odontologia_curitiba.pptx
@@ -3364,7 +3364,7 @@
                     <a:lstStyle/>
                     <a:p>
                       <a:r>
-                        <a:t>CNPJ: 46.364.200/0001-24</a:t>
+                        <a:t>Oral Unic Odontologia Cur</a:t>
                       </a:r>
                     </a:p>
                   </a:txBody>
@@ -3388,7 +3388,7 @@
                     <a:lstStyle/>
                     <a:p>
                       <a:r>
-                        <a:t>(41) 9851-2345</a:t>
+                        <a:t>(28) 2749-5500</a:t>
                       </a:r>
                     </a:p>
                   </a:txBody>
@@ -3414,7 +3414,7 @@
                     <a:lstStyle/>
                     <a:p>
                       <a:r>
-                        <a:t>Odontologia</a:t>
+                        <a:t>CNPJ: 58.524.532/0001-08</a:t>
                       </a:r>
                     </a:p>
                   </a:txBody>
@@ -3438,7 +3438,7 @@
                     <a:lstStyle/>
                     <a:p>
                       <a:r>
-                        <a:t>(41) 3253-1907</a:t>
+                        <a:t>(02) 5581-5700</a:t>
                       </a:r>
                     </a:p>
                   </a:txBody>
@@ -3464,7 +3464,7 @@
                     <a:lstStyle/>
                     <a:p>
                       <a:r>
-                        <a:t>Curitiba</a:t>
+                        <a:t>Odontologia</a:t>
                       </a:r>
                     </a:p>
                   </a:txBody>
@@ -3488,7 +3488,7 @@
                     <a:lstStyle/>
                     <a:p>
                       <a:r>
-                        <a:t>(41) 9876-2903</a:t>
+                        <a:t>(41) 3253-1907</a:t>
                       </a:r>
                     </a:p>
                   </a:txBody>
@@ -3514,7 +3514,7 @@
                     <a:lstStyle/>
                     <a:p>
                       <a:r>
-                        <a:t>Encontrar seu smartphone</a:t>
+                        <a:t>Curitiba</a:t>
                       </a:r>
                     </a:p>
                   </a:txBody>
@@ -3526,7 +3526,7 @@
                     <a:lstStyle/>
                     <a:p>
                       <a:r>
-                        <a:t>SEM SITE PRÓPRIO (OP</a:t>
+                        <a:t>SITE ATIVO 📱</a:t>
                       </a:r>
                     </a:p>
                   </a:txBody>
@@ -3538,7 +3538,7 @@
                     <a:lstStyle/>
                     <a:p>
                       <a:r>
-                        <a:t>(CU) 98877-6655</a:t>
+                        <a:t>(41) 9876-2903</a:t>
                       </a:r>
                     </a:p>
                   </a:txBody>
@@ -3564,7 +3564,7 @@
                     <a:lstStyle/>
                     <a:p>
                       <a:r>
-                        <a:t>OpenGuessr</a:t>
+                        <a:t>Dra.Keslen_Geffer</a:t>
                       </a:r>
                     </a:p>
                   </a:txBody>
@@ -3576,7 +3576,7 @@
                     <a:lstStyle/>
                     <a:p>
                       <a:r>
-                        <a:t>SITE ATIVO 📱</a:t>
+                        <a:t>SEM SITE PRÓPRIO (OP</a:t>
                       </a:r>
                     </a:p>
                   </a:txBody>
@@ -3588,7 +3588,7 @@
                     <a:lstStyle/>
                     <a:p>
                       <a:r>
-                        <a:t>(CU) 98877-6655</a:t>
+                        <a:t>(41) 3252-1119</a:t>
                       </a:r>
                     </a:p>
                   </a:txBody>
@@ -3614,7 +3614,7 @@
                     <a:lstStyle/>
                     <a:p>
                       <a:r>
-                        <a:t>Guess Where You Are</a:t>
+                        <a:t>Encontrar seu smartphone</a:t>
                       </a:r>
                     </a:p>
                   </a:txBody>
@@ -3626,7 +3626,7 @@
                     <a:lstStyle/>
                     <a:p>
                       <a:r>
-                        <a:t>SITE ATIVO 📱</a:t>
+                        <a:t>SEM SITE PRÓPRIO (OP</a:t>
                       </a:r>
                     </a:p>
                   </a:txBody>
@@ -3664,7 +3664,7 @@
                     <a:lstStyle/>
                     <a:p>
                       <a:r>
-                        <a:t>Clnica Felpe Odontologia </a:t>
+                        <a:t>Link to instagram.com</a:t>
                       </a:r>
                     </a:p>
                   </a:txBody>
@@ -3676,7 +3676,7 @@
                     <a:lstStyle/>
                     <a:p>
                       <a:r>
-                        <a:t>SITE ATIVO 📱</a:t>
+                        <a:t>SEM SITE PRÓPRIO (OP</a:t>
                       </a:r>
                     </a:p>
                   </a:txBody>
@@ -3688,7 +3688,7 @@
                     <a:lstStyle/>
                     <a:p>
                       <a:r>
-                        <a:t>41997321</a:t>
+                        <a:t>(CU) 98877-6655</a:t>
                       </a:r>
                     </a:p>
                   </a:txBody>
@@ -3714,7 +3714,7 @@
                     <a:lstStyle/>
                     <a:p>
                       <a:r>
-                        <a:t>UpClin Odontologia Curiti</a:t>
+                        <a:t>Clnica Felpe Odontologia </a:t>
                       </a:r>
                     </a:p>
                   </a:txBody>
@@ -3738,7 +3738,7 @@
                     <a:lstStyle/>
                     <a:p>
                       <a:r>
-                        <a:t>(41) 3095-9660</a:t>
+                        <a:t>41997321</a:t>
                       </a:r>
                     </a:p>
                   </a:txBody>
@@ -3764,7 +3764,7 @@
                     <a:lstStyle/>
                     <a:p>
                       <a:r>
-                        <a:t>SV Odontologia • Tratamen</a:t>
+                        <a:t>UpClin Odontologia Curiti</a:t>
                       </a:r>
                     </a:p>
                   </a:txBody>

--- a/relatorio_odontologia_curitiba.pptx
+++ b/relatorio_odontologia_curitiba.pptx
@@ -3314,7 +3314,7 @@
                     <a:lstStyle/>
                     <a:p>
                       <a:r>
-                        <a:t>OralClick Odontologia Cur</a:t>
+                        <a:t>Fujikawa Odontologia Dent</a:t>
                       </a:r>
                     </a:p>
                   </a:txBody>
@@ -3338,7 +3338,7 @@
                     <a:lstStyle/>
                     <a:p>
                       <a:r>
-                        <a:t>(CU) 98877-6655</a:t>
+                        <a:t>(41) 98825-8833</a:t>
                       </a:r>
                     </a:p>
                   </a:txBody>
@@ -3364,7 +3364,7 @@
                     <a:lstStyle/>
                     <a:p>
                       <a:r>
-                        <a:t>Oral Unic Odontologia Cur</a:t>
+                        <a:t>Mappi Odontologia</a:t>
                       </a:r>
                     </a:p>
                   </a:txBody>
@@ -3388,7 +3388,7 @@
                     <a:lstStyle/>
                     <a:p>
                       <a:r>
-                        <a:t>(28) 2749-5500</a:t>
+                        <a:t>(41) 99511-0171</a:t>
                       </a:r>
                     </a:p>
                   </a:txBody>
@@ -3414,7 +3414,7 @@
                     <a:lstStyle/>
                     <a:p>
                       <a:r>
-                        <a:t>CNPJ: 58.524.532/0001-08</a:t>
+                        <a:t>Arch Odontologia</a:t>
                       </a:r>
                     </a:p>
                   </a:txBody>
@@ -3438,7 +3438,7 @@
                     <a:lstStyle/>
                     <a:p>
                       <a:r>
-                        <a:t>(02) 5581-5700</a:t>
+                        <a:t>(41) 99272-0673</a:t>
                       </a:r>
                     </a:p>
                   </a:txBody>
@@ -3464,7 +3464,7 @@
                     <a:lstStyle/>
                     <a:p>
                       <a:r>
-                        <a:t>Odontologia</a:t>
+                        <a:t>Clnica Odontolgica</a:t>
                       </a:r>
                     </a:p>
                   </a:txBody>
@@ -3488,7 +3488,7 @@
                     <a:lstStyle/>
                     <a:p>
                       <a:r>
-                        <a:t>(41) 3253-1907</a:t>
+                        <a:t>(41) 98868-8164</a:t>
                       </a:r>
                     </a:p>
                   </a:txBody>
@@ -3514,7 +3514,7 @@
                     <a:lstStyle/>
                     <a:p>
                       <a:r>
-                        <a:t>Curitiba</a:t>
+                        <a:t>Dra. Tatiana Deliberador</a:t>
                       </a:r>
                     </a:p>
                   </a:txBody>
@@ -3538,7 +3538,7 @@
                     <a:lstStyle/>
                     <a:p>
                       <a:r>
-                        <a:t>(41) 9876-2903</a:t>
+                        <a:t>(41) 99231-9444</a:t>
                       </a:r>
                     </a:p>
                   </a:txBody>
@@ -3564,7 +3564,7 @@
                     <a:lstStyle/>
                     <a:p>
                       <a:r>
-                        <a:t>Dra.Keslen_Geffer</a:t>
+                        <a:t>Upclin Odontologia</a:t>
                       </a:r>
                     </a:p>
                   </a:txBody>
@@ -3576,7 +3576,7 @@
                     <a:lstStyle/>
                     <a:p>
                       <a:r>
-                        <a:t>SEM SITE PRÓPRIO (OP</a:t>
+                        <a:t>SITE ATIVO 📱</a:t>
                       </a:r>
                     </a:p>
                   </a:txBody>
@@ -3588,7 +3588,7 @@
                     <a:lstStyle/>
                     <a:p>
                       <a:r>
-                        <a:t>(41) 3252-1119</a:t>
+                        <a:t>(41) 99822-5551</a:t>
                       </a:r>
                     </a:p>
                   </a:txBody>
@@ -3614,7 +3614,7 @@
                     <a:lstStyle/>
                     <a:p>
                       <a:r>
-                        <a:t>Encontrar seu smartphone</a:t>
+                        <a:t>Dentista</a:t>
                       </a:r>
                     </a:p>
                   </a:txBody>
@@ -3626,7 +3626,7 @@
                     <a:lstStyle/>
                     <a:p>
                       <a:r>
-                        <a:t>SEM SITE PRÓPRIO (OP</a:t>
+                        <a:t>SITE ATIVO 📱</a:t>
                       </a:r>
                     </a:p>
                   </a:txBody>
@@ -3638,7 +3638,7 @@
                     <a:lstStyle/>
                     <a:p>
                       <a:r>
-                        <a:t>(CU) 98877-6655</a:t>
+                        <a:t>(41) 98868-8164</a:t>
                       </a:r>
                     </a:p>
                   </a:txBody>
@@ -3664,7 +3664,7 @@
                     <a:lstStyle/>
                     <a:p>
                       <a:r>
-                        <a:t>Link to instagram.com</a:t>
+                        <a:t>Clinica Odontologica Vide</a:t>
                       </a:r>
                     </a:p>
                   </a:txBody>
@@ -3676,7 +3676,7 @@
                     <a:lstStyle/>
                     <a:p>
                       <a:r>
-                        <a:t>SEM SITE PRÓPRIO (OP</a:t>
+                        <a:t>SITE FORA DO AR / LI</a:t>
                       </a:r>
                     </a:p>
                   </a:txBody>
@@ -3688,7 +3688,7 @@
                     <a:lstStyle/>
                     <a:p>
                       <a:r>
-                        <a:t>(CU) 98877-6655</a:t>
+                        <a:t>(41) 98868-8164</a:t>
                       </a:r>
                     </a:p>
                   </a:txBody>
@@ -3714,7 +3714,7 @@
                     <a:lstStyle/>
                     <a:p>
                       <a:r>
-                        <a:t>Clnica Felpe Odontologia </a:t>
+                        <a:t>Odontologia Curitiba</a:t>
                       </a:r>
                     </a:p>
                   </a:txBody>
@@ -3738,7 +3738,7 @@
                     <a:lstStyle/>
                     <a:p>
                       <a:r>
-                        <a:t>41997321</a:t>
+                        <a:t>(41) 99121-0803</a:t>
                       </a:r>
                     </a:p>
                   </a:txBody>
@@ -3764,7 +3764,7 @@
                     <a:lstStyle/>
                     <a:p>
                       <a:r>
-                        <a:t>UpClin Odontologia Curiti</a:t>
+                        <a:t>Carga Imediata</a:t>
                       </a:r>
                     </a:p>
                   </a:txBody>
@@ -3788,7 +3788,7 @@
                     <a:lstStyle/>
                     <a:p>
                       <a:r>
-                        <a:t>(CU) 98877-6655</a:t>
+                        <a:t>(41) 99998-2322</a:t>
                       </a:r>
                     </a:p>
                   </a:txBody>
